--- a/presentation.pptx
+++ b/presentation.pptx
@@ -1001,13 +1001,13 @@
           <a:lstStyle/>
           <a:p>
             <a:r>
-              <a:t>Only 3.3 points? On a ~65% ceiling, a significant gain over a matched baseline plus halved calibration error is meaningful — accuracy was capped, trustworthy confidence is the axis that moved. Why show score-mode? It's the contrast that proves accuracy ≠ calibration. Frame: train fine-tunes; val fits calibrator+threshold for both; test scored once identically — only fine-tuning differs.</a:t>
+              <a:t>Only 3.1 points? On a ~65% ceiling, a significant gain over a matched baseline is meaningful — accuracy is capped on this task. Note what did NOT move: the ECE difference vs the matched baseline is +0.0097 [-0.0057, +0.0270], which straddles zero, so fine-tuning buys accuracy and not calibration. Why show score-mode? It's the contrast that proves accuracy ≠ calibration. Frame: train fine-tunes; val fits calibrator+threshold for both; test scored once identically — only fine-tuning differs.</a:t>
             </a:r>
           </a:p>
           <a:p/>
           <a:p>
             <a:r>
-              <a:t>Variance caveat: results vary slightly run-to-run due to non-deterministic inference even at temperature 0; the fine-tuning effect was consistently positive and significant across runs (+0.017 to +0.033).</a:t>
+              <a:t>Variance caveat: results vary slightly run-to-run due to non-deterministic inference even at temperature 0; the fine-tuning effect is +0.031 [+0.019, +0.043], McNemar p=6.3e-07. A live refetch of the same prompts reproduced every metric to within 0.003.</a:t>
             </a:r>
           </a:p>
         </p:txBody>
@@ -1147,7 +1147,7 @@
           <a:lstStyle/>
           <a:p>
             <a:r>
-              <a:t>Why two methods? Occlusion is causal — change input, watch real output; rationale is readable but only ~46% faithful, so I lead with occlusion and treat rationales as hypotheses, catching the model rationalizing. 46% — good or bad? Bad for the model's self-explanations, good for my explainer that detected it. Shortcut helps or hurts? Hurts (62.5% vs 75.6% — speaker- vs statement-driven); correlational but speaker-driven predictions are the less trustworthy ones — causal confirmation of slide 3's leakage risk.</a:t>
+              <a:t>Why two methods? Occlusion is causal — change input, watch real output; rationale is readable but unverified, so I lead with occlusion and treat rationales as hypotheses. On agreement: 0.457 looks like a moderate faithfulness rate, but the permutation null is 0.436 (p=0.19) — the categories overlap and a rationale cites 1.6 of 5 on average, so the chance floor is high. The honest reading is that rationales carry no DETECTABLE signal about the true driver, which is evidence of absent signal rather than a measured faithfulness rate. Shortcut helps or hurts? Speaker-driven predictions land at their subset's majority-class rate (0.564 vs 0.564) — no signal beyond the class prior — while statement-driven sit +0.215 above theirs. Causal confirmation of slide 3's leakage risk. n=78 for the speaker subset, so the interval is wide; this rules in 'no better than the prior' without ruling out a small effect.</a:t>
             </a:r>
           </a:p>
         </p:txBody>
@@ -4473,7 +4473,7 @@
                   <a:srgbClr val="222222"/>
                 </a:solidFill>
               </a:rPr>
-              <a:t>•  Story: a low-ceiling task evaluated leakage-free; fine-tuning gave a significant accuracy gain over matched zero-shot and halved calibration error; the explainer exposed a speaker shortcut that hurts and showed self-rationales are unreliable.</a:t>
+              <a:t>•  Story: a low-ceiling task evaluated leakage-free; fine-tuning gave a significant accuracy gain over matched zero-shot (+0.031, p=6e-07) but NO calibration gain; post-hoc calibration is what buys confidence quality (ECE 0.316 → 0.061); the explainer showed speaker-driven predictions perform at the majority-class baseline and that self-rationales agree with the true driver only at chance.</a:t>
             </a:r>
           </a:p>
           <a:p>
@@ -5371,7 +5371,7 @@
                   <a:srgbClr val="222222"/>
                 </a:solidFill>
               </a:rPr>
-              <a:t>•  Baseline (calibrated, test): acc 0.668, ECE 0.053.</a:t>
+              <a:t>•  Baseline (calibrated, test): acc 0.668, ECE 0.061.</a:t>
             </a:r>
           </a:p>
         </p:txBody>
@@ -5677,7 +5677,7 @@
                   <a:srgbClr val="2E6DA4"/>
                 </a:solidFill>
               </a:rPr>
-              <a:t>Fine-tuning beats matched zero-shot +3.3 pts (p &lt; 0.001) AND halves calibration error.</a:t>
+              <a:t>Fine-tuning beats the matched zero-shot baseline by +3.1 pts (p &lt; 1e-6). Calibration cuts ECE by ~0.22; fine-tuning itself does not improve it.</a:t>
             </a:r>
           </a:p>
         </p:txBody>
@@ -6043,7 +6043,7 @@
                             <a:srgbClr val="222222"/>
                           </a:solidFill>
                         </a:rPr>
-                        <a:t>0.662</a:t>
+                        <a:t>0.663</a:t>
                       </a:r>
                     </a:p>
                   </a:txBody>
@@ -6087,7 +6087,7 @@
                             <a:srgbClr val="222222"/>
                           </a:solidFill>
                         </a:rPr>
-                        <a:t>0.679</a:t>
+                        <a:t>0.690</a:t>
                       </a:r>
                     </a:p>
                   </a:txBody>
@@ -6109,7 +6109,7 @@
                             <a:srgbClr val="222222"/>
                           </a:solidFill>
                         </a:rPr>
-                        <a:t>0.217</a:t>
+                        <a:t>0.218</a:t>
                       </a:r>
                     </a:p>
                   </a:txBody>
@@ -6131,7 +6131,7 @@
                             <a:srgbClr val="222222"/>
                           </a:solidFill>
                         </a:rPr>
-                        <a:t>0.053</a:t>
+                        <a:t>0.061</a:t>
                       </a:r>
                     </a:p>
                   </a:txBody>
@@ -6177,7 +6177,7 @@
                             <a:srgbClr val="2E7D4F"/>
                           </a:solidFill>
                         </a:rPr>
-                        <a:t>0.701</a:t>
+                        <a:t>0.699</a:t>
                       </a:r>
                     </a:p>
                   </a:txBody>
@@ -6199,7 +6199,7 @@
                             <a:srgbClr val="2E7D4F"/>
                           </a:solidFill>
                         </a:rPr>
-                        <a:t>0.695</a:t>
+                        <a:t>0.694</a:t>
                       </a:r>
                     </a:p>
                   </a:txBody>
@@ -6221,7 +6221,7 @@
                             <a:srgbClr val="2E7D4F"/>
                           </a:solidFill>
                         </a:rPr>
-                        <a:t>0.696</a:t>
+                        <a:t>0.694</a:t>
                       </a:r>
                     </a:p>
                   </a:txBody>
@@ -6265,7 +6265,7 @@
                             <a:srgbClr val="2E7D4F"/>
                           </a:solidFill>
                         </a:rPr>
-                        <a:t>0.716</a:t>
+                        <a:t>0.722</a:t>
                       </a:r>
                     </a:p>
                   </a:txBody>
@@ -6287,7 +6287,7 @@
                             <a:srgbClr val="2E7D4F"/>
                           </a:solidFill>
                         </a:rPr>
-                        <a:t>0.201</a:t>
+                        <a:t>0.203</a:t>
                       </a:r>
                     </a:p>
                   </a:txBody>
@@ -6309,7 +6309,7 @@
                             <a:srgbClr val="2E7D4F"/>
                           </a:solidFill>
                         </a:rPr>
-                        <a:t>0.027</a:t>
+                        <a:t>0.052</a:t>
                       </a:r>
                     </a:p>
                   </a:txBody>
@@ -6443,7 +6443,7 @@
                             <a:srgbClr val="7A7A7A"/>
                           </a:solidFill>
                         </a:rPr>
-                        <a:t>0.660</a:t>
+                        <a:t>0.680</a:t>
                       </a:r>
                     </a:p>
                   </a:txBody>
@@ -6465,7 +6465,7 @@
                             <a:srgbClr val="7A7A7A"/>
                           </a:solidFill>
                         </a:rPr>
-                        <a:t>0.225</a:t>
+                        <a:t>0.227</a:t>
                       </a:r>
                     </a:p>
                   </a:txBody>
@@ -6487,7 +6487,7 @@
                             <a:srgbClr val="7A7A7A"/>
                           </a:solidFill>
                         </a:rPr>
-                        <a:t>0.117</a:t>
+                        <a:t>0.108</a:t>
                       </a:r>
                     </a:p>
                   </a:txBody>
@@ -6530,7 +6530,7 @@
                   <a:srgbClr val="1F3A5F"/>
                 </a:solidFill>
               </a:rPr>
-              <a:t>Clean fine-tuning effect (matched elicitation): Δacc +0.033 [+0.021, +0.045], McNemar p &lt; 0.001. Calibration: ECE 0.053 → 0.027.</a:t>
+              <a:t>Clean fine-tuning effect (matched elicitation): Δacc +0.031 [+0.019, +0.043], McNemar p &lt; 0.001. Calibration: ECE 0.061 → 0.052.</a:t>
             </a:r>
           </a:p>
           <a:p>
@@ -6540,7 +6540,7 @@
                   <a:srgbClr val="7A7A7A"/>
                 </a:solidFill>
               </a:rPr>
-              <a:t>Secondary (score-mode): highest accuracy yet ~4× worse calibrated (ECE 0.117 vs 0.027) — accuracy ≠ trustworthiness.</a:t>
+              <a:t>Secondary (score-mode): highest accuracy yet ~4× worse calibrated (ECE 0.108 vs 0.052) — accuracy ≠ trustworthiness.</a:t>
             </a:r>
           </a:p>
         </p:txBody>
@@ -6721,7 +6721,7 @@
                   <a:srgbClr val="222222"/>
                 </a:solidFill>
               </a:rPr>
-              <a:t>•  ECE 0.053 → 0.027 (more than halved); reliability diagram moves toward the diagonal.</a:t>
+              <a:t>•  Calibration cuts ECE 0.316 → 0.061 (+0.255 [+0.213, +0.279]); fine-tuning does not improve calibration (+0.010, CI straddles zero).</a:t>
             </a:r>
           </a:p>
           <a:p>
@@ -6758,7 +6758,7 @@
         <p:spPr>
           <a:xfrm>
             <a:off x="6766560" y="1554480"/>
-            <a:ext cx="4754880" cy="4311993"/>
+            <a:ext cx="4754880" cy="3845763"/>
           </a:xfrm>
           <a:prstGeom prst="rect">
             <a:avLst/>
@@ -6956,7 +6956,37 @@
                   <a:srgbClr val="222222"/>
                 </a:solidFill>
               </a:rPr>
-              <a:t>•  Removing speaker flips 8% of predictions, all metadata 12.3%; rationales only ~46% faithful; speaker-driven predictions less accurate (statement-driven 0.752 vs speaker-driven 0.625).</a:t>
+              <a:t>•  Removing speaker flips 10% of predictions, all metadata 13.3%.</a:t>
+            </a:r>
+          </a:p>
+          <a:p>
+            <a:pPr>
+              <a:spcAft>
+                <a:spcPts val="800"/>
+              </a:spcAft>
+            </a:pPr>
+            <a:r>
+              <a:rPr sz="1500">
+                <a:solidFill>
+                  <a:srgbClr val="222222"/>
+                </a:solidFill>
+              </a:rPr>
+              <a:t>•  Speaker-driven predictions sit at the majority-class baseline of their subset (0.564 vs 0.564, Δ = +0.000 [-0.141, +0.128]); statement-driven are +0.215 [+0.108, +0.285] above theirs.</a:t>
+            </a:r>
+          </a:p>
+          <a:p>
+            <a:pPr>
+              <a:spcAft>
+                <a:spcPts val="800"/>
+              </a:spcAft>
+            </a:pPr>
+            <a:r>
+              <a:rPr sz="1500">
+                <a:solidFill>
+                  <a:srgbClr val="222222"/>
+                </a:solidFill>
+              </a:rPr>
+              <a:t>•  Rationale-occlusion agreement 0.457 is indistinguishable from chance (permutation p = 0.19): the model's self-explanations carry no detectable information about what actually drove the prediction.</a:t>
             </a:r>
           </a:p>
         </p:txBody>
@@ -6978,7 +7008,7 @@
         <p:spPr>
           <a:xfrm>
             <a:off x="502920" y="3200400"/>
-            <a:ext cx="5577840" cy="3420811"/>
+            <a:ext cx="5577840" cy="3423366"/>
           </a:xfrm>
           <a:prstGeom prst="rect">
             <a:avLst/>
@@ -7002,7 +7032,7 @@
         <p:spPr>
           <a:xfrm>
             <a:off x="6309360" y="3200400"/>
-            <a:ext cx="5577840" cy="3809436"/>
+            <a:ext cx="5577840" cy="3308456"/>
           </a:xfrm>
           <a:prstGeom prst="rect">
             <a:avLst/>
